--- a/deck/MARNI_2026H1_Sales_Review.pptx
+++ b/deck/MARNI_2026H1_Sales_Review.pptx
@@ -34,6 +34,7 @@
     <p:sldId id="289" r:id="rId40"/>
     <p:sldId id="290" r:id="rId41"/>
     <p:sldId id="291" r:id="rId42"/>
+    <p:sldId id="292" r:id="rId43"/>
   </p:sldIdLst>
   <p:sldSz cx="9144000" cy="5143500" type="screen16x9"/>
   <p:notesSz cx="6858000" cy="9144000"/>
@@ -1839,9 +1840,9 @@
           </c:spPr>
           <c:cat>
             <c:strRef>
-              <c:f>Sheet1!$A$2:$A$6</c:f>
+              <c:f>Sheet1!$A$2:$A$7</c:f>
               <c:strCache>
-                <c:ptCount val="5"/>
+                <c:ptCount val="6"/>
                 <c:pt idx="0">
                   <c:v>中国</c:v>
                 </c:pt>
@@ -1857,15 +1858,18 @@
                 <c:pt idx="4">
                   <c:v>香港</c:v>
                 </c:pt>
+                <c:pt idx="5">
+                  <c:v>その他</c:v>
+                </c:pt>
               </c:strCache>
             </c:strRef>
           </c:cat>
           <c:val>
             <c:numRef>
-              <c:f>Sheet1!$B$2:$B$6</c:f>
+              <c:f>Sheet1!$B$2:$B$7</c:f>
               <c:numCache>
                 <c:formatCode>General</c:formatCode>
-                <c:ptCount val="5"/>
+                <c:ptCount val="6"/>
                 <c:pt idx="0">
                   <c:v>89.7</c:v>
                 </c:pt>
@@ -1880,6 +1884,9 @@
                 </c:pt>
                 <c:pt idx="4">
                   <c:v>9.4</c:v>
+                </c:pt>
+                <c:pt idx="5">
+                  <c:v>51.2</c:v>
                 </c:pt>
               </c:numCache>
             </c:numRef>
@@ -1906,9 +1913,9 @@
           </c:spPr>
           <c:cat>
             <c:strRef>
-              <c:f>Sheet1!$A$2:$A$6</c:f>
+              <c:f>Sheet1!$A$2:$A$7</c:f>
               <c:strCache>
-                <c:ptCount val="5"/>
+                <c:ptCount val="6"/>
                 <c:pt idx="0">
                   <c:v>中国</c:v>
                 </c:pt>
@@ -1924,15 +1931,18 @@
                 <c:pt idx="4">
                   <c:v>香港</c:v>
                 </c:pt>
+                <c:pt idx="5">
+                  <c:v>その他</c:v>
+                </c:pt>
               </c:strCache>
             </c:strRef>
           </c:cat>
           <c:val>
             <c:numRef>
-              <c:f>Sheet1!$C$2:$C$6</c:f>
+              <c:f>Sheet1!$C$2:$C$7</c:f>
               <c:numCache>
                 <c:formatCode>General</c:formatCode>
-                <c:ptCount val="5"/>
+                <c:ptCount val="6"/>
                 <c:pt idx="0">
                   <c:v>53.6</c:v>
                 </c:pt>
@@ -1947,6 +1957,9 @@
                 </c:pt>
                 <c:pt idx="4">
                   <c:v>12.8</c:v>
+                </c:pt>
+                <c:pt idx="5">
+                  <c:v>71.0</c:v>
                 </c:pt>
               </c:numCache>
             </c:numRef>
@@ -18761,7 +18774,7 @@
                 </a:solidFill>
                 <a:latin typeface="Helvetica Neue"/>
               </a:rPr>
-              <a:t>客単価の押し上げ+246百万円を、さらに買上点数と1点単価に分けた。</a:t>
+              <a:t>客単価の押し上げ+246百万円を、買上点数と1点単価に分けた。</a:t>
             </a:r>
           </a:p>
           <a:p>
@@ -18793,7 +18806,7 @@
                 </a:solidFill>
                 <a:latin typeface="Helvetica Neue"/>
               </a:rPr>
-              <a:t>1点単価（AP）は100,610→110,118円（+9.5%）で+191百万円。全体の8割を占める。</a:t>
+              <a:t>1点単価（AP）は100,610→110,118円（+9.5%）で+191百万円。内訳の8割を占める。</a:t>
             </a:r>
           </a:p>
           <a:p>
@@ -18857,7 +18870,39 @@
                 </a:solidFill>
                 <a:latin typeface="Helvetica Neue"/>
               </a:rPr>
-              <a:t>つまり単価上昇の主因は「1人がたくさん買った」ではなく「高い商品が売れた」。数量は-8.3%と減っており、値上げと商品ミックスの変化に支えられた構造である。</a:t>
+              <a:t>主因は「1人がたくさん買った」ではなく「高い商品が売れた」。数量は-8.3%と減っている。</a:t>
+            </a:r>
+          </a:p>
+          <a:p>
+            <a:pPr algn="l">
+              <a:lnSpc>
+                <a:spcPct val="120000"/>
+              </a:lnSpc>
+            </a:pPr>
+            <a:r>
+              <a:rPr sz="1000" b="0">
+                <a:solidFill>
+                  <a:srgbClr val="000000"/>
+                </a:solidFill>
+                <a:latin typeface="Helvetica Neue"/>
+              </a:rPr>
+              <a:t/>
+            </a:r>
+          </a:p>
+          <a:p>
+            <a:pPr algn="l">
+              <a:lnSpc>
+                <a:spcPct val="120000"/>
+              </a:lnSpc>
+            </a:pPr>
+            <a:r>
+              <a:rPr sz="1000" b="0">
+                <a:solidFill>
+                  <a:srgbClr val="000000"/>
+                </a:solidFill>
+                <a:latin typeface="Helvetica Neue"/>
+              </a:rPr>
+              <a:t>※UPTが丸め値のため内訳合計は+239百万円で約7百万円の誤差。</a:t>
             </a:r>
           </a:p>
         </p:txBody>
@@ -19469,7 +19514,7 @@
                 </a:solidFill>
                 <a:latin typeface="Helvetica Neue"/>
               </a:rPr>
-              <a:t>月次で見ると、セール月である1月（+8.7%）と6月（+2.1%）はプラス。</a:t>
+              <a:t>セール月である1月（+8.7%）と6月（+2.1%）はいずれもプラス。</a:t>
             </a:r>
           </a:p>
           <a:p>
@@ -19501,7 +19546,7 @@
                 </a:solidFill>
                 <a:latin typeface="Helvetica Neue"/>
               </a:rPr>
-              <a:t>一方でプロパー月は2月-3.1%、3月-0.1%、4月-10.4%と苦戦し、4月が上期で最も悪い月となった。5月のみ+2.6%。</a:t>
+              <a:t>プロパー月は4か月中3か月がマイナスで、2月-3.1%、3月-0.1%、4月-10.4%。上期で最も悪い月は4月であり、これもプロパー月である。</a:t>
             </a:r>
           </a:p>
           <a:p>
@@ -19533,7 +19578,7 @@
                 </a:solidFill>
                 <a:latin typeface="Helvetica Neue"/>
               </a:rPr>
-              <a:t>セール月に伸ばし、プロパー月に落とす。前ページの「セール依存」が月次でも裏づけられる。</a:t>
+              <a:t>ただし5月はプロパー月ながら+2.6%。「セール月＝プラス／プロパー月＝マイナス」と単純に二分できるわけではない点は留意が必要である。</a:t>
             </a:r>
           </a:p>
         </p:txBody>
@@ -22295,7 +22340,7 @@
                 </a:solidFill>
                 <a:latin typeface="Helvetica Neue"/>
               </a:rPr>
-              <a:t>既存顧客は売上+12.3%、客単価183,850円と好調。一方で新規顧客は顧客数-12.7%、売上-3.5%。</a:t>
+              <a:t>2026年の客単価で金額換算すると、新規顧客の減少は約-1.67億円、既存顧客の増加は約+0.18億円。新規の落ち込みが既存の伸びの約9倍の規模でマイナスに効いている。</a:t>
             </a:r>
           </a:p>
           <a:p>
@@ -22327,7 +22372,7 @@
                 </a:solidFill>
                 <a:latin typeface="Helvetica Neue"/>
               </a:rPr>
-              <a:t>既存客の育成は機能している。止まっているのは新規客の獲得である。</a:t>
+              <a:t>既存客の育成は機能している（売上+12.3%、客単価183,850円）。止まっているのは新規客の獲得である。</a:t>
             </a:r>
           </a:p>
         </p:txBody>
@@ -22384,7 +22429,7 @@
                 </a:solidFill>
                 <a:latin typeface="Helvetica Neue"/>
               </a:rPr>
-              <a:t>出典: 店長会 2026H1 レビュー資料</a:t>
+              <a:t>出典: 店長会 2026H1 レビュー資料。金額換算は客単価一定を仮定した概算</a:t>
             </a:r>
           </a:p>
         </p:txBody>
@@ -24603,7 +24648,7 @@
                 </a:solidFill>
                 <a:latin typeface="Helvetica Neue"/>
               </a:rPr>
-              <a:t>バッグは-10.7%。プロパーに限ると-23.2%、数量は-28.1%と大きく落ちている。</a:t>
+              <a:t>最大の減少要因はショッピングバッグ単独で-71.3百万円。ただし同じバッグでもハンドバッグは+20.5百万円と伸びており、バッグ全体の不振ではなく特定の商品タイプに問題が集中している。</a:t>
             </a:r>
           </a:p>
           <a:p>
@@ -24635,7 +24680,7 @@
                 </a:solidFill>
                 <a:latin typeface="Helvetica Neue"/>
               </a:rPr>
-              <a:t>最大の減少要因はショッピングバッグ単独で-71.3百万円。同カテゴリのハンドバッグは+20.5百万円と伸びており、バッグ全体の不振ではなく特定モデルの問題である可能性が高い。</a:t>
+              <a:t>なお構成比は小さい（3.3%）ものの、フットウェアは売上-33.2%・数量-47.9%と全カテゴリで最も悪化幅が大きい。</a:t>
             </a:r>
           </a:p>
         </p:txBody>
@@ -24798,7 +24843,7 @@
             </a:pPr>
             <a:r>
               <a:rPr lang="en-GB"/>
-              <a:t>インバウンドは中国減を米国・台湾が補った</a:t>
+              <a:t>インバウンドは中国依存から分散へ向かっている</a:t>
             </a:r>
             <a:endParaRPr/>
           </a:p>
@@ -24893,7 +24938,7 @@
                 </a:solidFill>
                 <a:latin typeface="Helvetica Neue"/>
               </a:rPr>
-              <a:t>インバウンド売上は203.7百万円で+2.4%、構成比9.2%。金額は維持している。</a:t>
+              <a:t>インバウンド売上は203.7百万円で+2.4%、構成比9.2%。</a:t>
             </a:r>
           </a:p>
           <a:p>
@@ -24925,7 +24970,7 @@
                 </a:solidFill>
                 <a:latin typeface="Helvetica Neue"/>
               </a:rPr>
-              <a:t>ただし取引件数は-17.5%。客単価が+24.1%と大きく伸びたことで金額を保った形で、全社と同じ「客数減・単価増」の構造である。</a:t>
+              <a:t>ただし取引件数は-17.5%。客単価+24.1%で金額を保った形で、全社と同じ「客数減・単価増」の構造である。</a:t>
             </a:r>
           </a:p>
           <a:p>
@@ -24957,7 +25002,7 @@
                 </a:solidFill>
                 <a:latin typeface="Helvetica Neue"/>
               </a:rPr>
-              <a:t>国別では中国が-40%と大きく落ち、米国+35%・台湾+49%がこれを補った。特定国への依存度は下がったが、母数そのものは細っている。</a:t>
+              <a:t>中国は-40%と大きく落ちた。補ったのは米国+35%・台湾+49%だけではない。上位5カ国に入らない「その他」が51.2→71.0百万円（+38.7%）へ拡大し、いまや中国を上回る規模になっている。</a:t>
             </a:r>
           </a:p>
         </p:txBody>
@@ -25014,7 +25059,7 @@
                 </a:solidFill>
                 <a:latin typeface="Helvetica Neue"/>
               </a:rPr>
-              <a:t>出典: 店長会 2026H1 レビュー資料</a:t>
+              <a:t>出典: 店長会 2026H1 レビュー資料。「その他」は総額と上位5カ国の差分</a:t>
             </a:r>
           </a:p>
         </p:txBody>
@@ -25282,7 +25327,7 @@
             </a:pPr>
             <a:r>
               <a:rPr lang="en-GB"/>
-              <a:t>下期に向けて決めるべき4つの論点</a:t>
+              <a:t>決めるべきこと① 売上の構造</a:t>
             </a:r>
             <a:endParaRPr/>
           </a:p>
@@ -25352,7 +25397,7 @@
         <p:spPr>
           <a:xfrm>
             <a:off x="1078992" y="1078992"/>
-            <a:ext cx="6986016" cy="274320"/>
+            <a:ext cx="6986016" cy="548640"/>
           </a:xfrm>
           <a:prstGeom prst="rect">
             <a:avLst/>
@@ -25377,7 +25422,7 @@
                 </a:solidFill>
                 <a:latin typeface="Helvetica Neue"/>
               </a:rPr>
-              <a:t>いずれも上期のデータから導かれる、今期中に判断が要るもの。</a:t>
+              <a:t>客数をどう戻すか、セール依存をどこで止めるか。この2つが下期の前提を決める。</a:t>
             </a:r>
           </a:p>
         </p:txBody>
@@ -25390,7 +25435,7 @@
         </p:nvSpPr>
         <p:spPr>
           <a:xfrm>
-            <a:off x="1078992" y="1563624"/>
+            <a:off x="1078992" y="1837943"/>
             <a:ext cx="82296" cy="82296"/>
           </a:xfrm>
           <a:prstGeom prst="rect">
@@ -25434,7 +25479,7 @@
         </p:nvSpPr>
         <p:spPr>
           <a:xfrm>
-            <a:off x="1280160" y="1517904"/>
+            <a:off x="1280160" y="1792224"/>
             <a:ext cx="6784848" cy="274320"/>
           </a:xfrm>
           <a:prstGeom prst="rect">
@@ -25460,7 +25505,7 @@
                 </a:solidFill>
                 <a:latin typeface="Helvetica Neue"/>
               </a:rPr>
-              <a:t>論点1｜新規客の獲得をどう立て直すか</a:t>
+              <a:t>論点1｜既存店の客数減に歯止めをかけるか</a:t>
             </a:r>
           </a:p>
         </p:txBody>
@@ -25473,8 +25518,8 @@
         </p:nvSpPr>
         <p:spPr>
           <a:xfrm>
-            <a:off x="1280160" y="1792224"/>
-            <a:ext cx="6784848" cy="345186"/>
+            <a:off x="1280160" y="2066543"/>
+            <a:ext cx="6784848" cy="864108"/>
           </a:xfrm>
           <a:prstGeom prst="rect">
             <a:avLst/>
@@ -25499,7 +25544,7 @@
                 </a:solidFill>
                 <a:latin typeface="Helvetica Neue"/>
               </a:rPr>
-              <a:t>事実: 客数減の主因は新規客-1,369件。表参道-20.5%、渋谷スクランブル-19.1%と旗艦店で落ちている。／決めること: 新規獲得を店舗任せにするか、本社主導で投資するか。</a:t>
+              <a:t>事実: 既存25ドアは客数-12.9%。新店を除けば実質減収。／決めること: 既存店の集客に投資するか。その前提として入店客数の計測に着手するか（現状は設置状況の管理のみ）。</a:t>
             </a:r>
           </a:p>
         </p:txBody>
@@ -25512,7 +25557,7 @@
         </p:nvSpPr>
         <p:spPr>
           <a:xfrm>
-            <a:off x="1078992" y="2219706"/>
+            <a:off x="1078992" y="3012948"/>
             <a:ext cx="82296" cy="82296"/>
           </a:xfrm>
           <a:prstGeom prst="rect">
@@ -25556,7 +25601,7 @@
         </p:nvSpPr>
         <p:spPr>
           <a:xfrm>
-            <a:off x="1280160" y="2173986"/>
+            <a:off x="1280160" y="2967228"/>
             <a:ext cx="6784848" cy="274320"/>
           </a:xfrm>
           <a:prstGeom prst="rect">
@@ -25582,7 +25627,7 @@
                 </a:solidFill>
                 <a:latin typeface="Helvetica Neue"/>
               </a:rPr>
-              <a:t>論点2｜単価依存をいつまで続けるか</a:t>
+              <a:t>論点2｜セール依存に上限を設けるか</a:t>
             </a:r>
           </a:p>
         </p:txBody>
@@ -25595,8 +25640,8 @@
         </p:nvSpPr>
         <p:spPr>
           <a:xfrm>
-            <a:off x="1280160" y="2448306"/>
-            <a:ext cx="6784848" cy="345186"/>
+            <a:off x="1280160" y="3241548"/>
+            <a:ext cx="6784848" cy="864108"/>
           </a:xfrm>
           <a:prstGeom prst="rect">
             <a:avLst/>
@@ -25621,251 +25666,7 @@
                 </a:solidFill>
                 <a:latin typeface="Helvetica Neue"/>
               </a:rPr>
-              <a:t>事実: 単価上昇の8割は1点単価（+9.5%）によるもので、数量は-8.3%。／決めること: 下期も単価で埋める前提で組むか、客数回復に舵を切るか。</a:t>
-            </a:r>
-          </a:p>
-        </p:txBody>
-      </p:sp>
-      <p:sp>
-        <p:nvSpPr>
-          <p:cNvPr id="176" name="Rectangle 175"/>
-          <p:cNvSpPr/>
-          <p:nvPr/>
-        </p:nvSpPr>
-        <p:spPr>
-          <a:xfrm>
-            <a:off x="1078992" y="2875787"/>
-            <a:ext cx="82296" cy="82296"/>
-          </a:xfrm>
-          <a:prstGeom prst="rect">
-            <a:avLst/>
-          </a:prstGeom>
-          <a:solidFill>
-            <a:srgbClr val="DA1212"/>
-          </a:solidFill>
-          <a:ln>
-            <a:noFill/>
-          </a:ln>
-          <a:effectLst/>
-        </p:spPr>
-        <p:style>
-          <a:lnRef idx="1">
-            <a:schemeClr val="accent1"/>
-          </a:lnRef>
-          <a:fillRef idx="3">
-            <a:schemeClr val="accent1"/>
-          </a:fillRef>
-          <a:effectRef idx="2">
-            <a:schemeClr val="accent1"/>
-          </a:effectRef>
-          <a:fontRef idx="minor">
-            <a:schemeClr val="lt1"/>
-          </a:fontRef>
-        </p:style>
-        <p:txBody>
-          <a:bodyPr rtlCol="0" anchor="ctr"/>
-          <a:lstStyle/>
-          <a:p>
-            <a:pPr algn="ctr"/>
-          </a:p>
-        </p:txBody>
-      </p:sp>
-      <p:sp>
-        <p:nvSpPr>
-          <p:cNvPr id="177" name="TextBox 176"/>
-          <p:cNvSpPr txBox="1"/>
-          <p:nvPr/>
-        </p:nvSpPr>
-        <p:spPr>
-          <a:xfrm>
-            <a:off x="1280160" y="2830068"/>
-            <a:ext cx="6784848" cy="274320"/>
-          </a:xfrm>
-          <a:prstGeom prst="rect">
-            <a:avLst/>
-          </a:prstGeom>
-          <a:noFill/>
-        </p:spPr>
-        <p:txBody>
-          <a:bodyPr wrap="square" anchor="t" lIns="0" rIns="0" tIns="0" bIns="0">
-            <a:spAutoFit/>
-          </a:bodyPr>
-          <a:lstStyle/>
-          <a:p>
-            <a:pPr algn="l">
-              <a:lnSpc>
-                <a:spcPct val="120000"/>
-              </a:lnSpc>
-            </a:pPr>
-            <a:r>
-              <a:rPr sz="1200" b="1">
-                <a:solidFill>
-                  <a:srgbClr val="000000"/>
-                </a:solidFill>
-                <a:latin typeface="Helvetica Neue"/>
-              </a:rPr>
-              <a:t>論点3｜バッグ事業をどう扱うか</a:t>
-            </a:r>
-          </a:p>
-        </p:txBody>
-      </p:sp>
-      <p:sp>
-        <p:nvSpPr>
-          <p:cNvPr id="178" name="TextBox 177"/>
-          <p:cNvSpPr txBox="1"/>
-          <p:nvPr/>
-        </p:nvSpPr>
-        <p:spPr>
-          <a:xfrm>
-            <a:off x="1280160" y="3104387"/>
-            <a:ext cx="6784848" cy="345186"/>
-          </a:xfrm>
-          <a:prstGeom prst="rect">
-            <a:avLst/>
-          </a:prstGeom>
-          <a:noFill/>
-        </p:spPr>
-        <p:txBody>
-          <a:bodyPr wrap="square" anchor="t" lIns="0" rIns="0" tIns="0" bIns="0">
-            <a:spAutoFit/>
-          </a:bodyPr>
-          <a:lstStyle/>
-          <a:p>
-            <a:pPr algn="l">
-              <a:lnSpc>
-                <a:spcPct val="120000"/>
-              </a:lnSpc>
-            </a:pPr>
-            <a:r>
-              <a:rPr sz="1000" b="0">
-                <a:solidFill>
-                  <a:srgbClr val="000000"/>
-                </a:solidFill>
-                <a:latin typeface="Helvetica Neue"/>
-              </a:rPr>
-              <a:t>事実: ショッピングバッグ単独で-71.3百万円。一方ハンドバッグは+20.5百万円。／決めること: RTWシフトを是とするか、バッグを再建対象と位置づけるか。</a:t>
-            </a:r>
-          </a:p>
-        </p:txBody>
-      </p:sp>
-      <p:sp>
-        <p:nvSpPr>
-          <p:cNvPr id="179" name="Rectangle 178"/>
-          <p:cNvSpPr/>
-          <p:nvPr/>
-        </p:nvSpPr>
-        <p:spPr>
-          <a:xfrm>
-            <a:off x="1078992" y="3531870"/>
-            <a:ext cx="82296" cy="82296"/>
-          </a:xfrm>
-          <a:prstGeom prst="rect">
-            <a:avLst/>
-          </a:prstGeom>
-          <a:solidFill>
-            <a:srgbClr val="DA1212"/>
-          </a:solidFill>
-          <a:ln>
-            <a:noFill/>
-          </a:ln>
-          <a:effectLst/>
-        </p:spPr>
-        <p:style>
-          <a:lnRef idx="1">
-            <a:schemeClr val="accent1"/>
-          </a:lnRef>
-          <a:fillRef idx="3">
-            <a:schemeClr val="accent1"/>
-          </a:fillRef>
-          <a:effectRef idx="2">
-            <a:schemeClr val="accent1"/>
-          </a:effectRef>
-          <a:fontRef idx="minor">
-            <a:schemeClr val="lt1"/>
-          </a:fontRef>
-        </p:style>
-        <p:txBody>
-          <a:bodyPr rtlCol="0" anchor="ctr"/>
-          <a:lstStyle/>
-          <a:p>
-            <a:pPr algn="ctr"/>
-          </a:p>
-        </p:txBody>
-      </p:sp>
-      <p:sp>
-        <p:nvSpPr>
-          <p:cNvPr id="180" name="TextBox 179"/>
-          <p:cNvSpPr txBox="1"/>
-          <p:nvPr/>
-        </p:nvSpPr>
-        <p:spPr>
-          <a:xfrm>
-            <a:off x="1280160" y="3486150"/>
-            <a:ext cx="6784848" cy="274320"/>
-          </a:xfrm>
-          <a:prstGeom prst="rect">
-            <a:avLst/>
-          </a:prstGeom>
-          <a:noFill/>
-        </p:spPr>
-        <p:txBody>
-          <a:bodyPr wrap="square" anchor="t" lIns="0" rIns="0" tIns="0" bIns="0">
-            <a:spAutoFit/>
-          </a:bodyPr>
-          <a:lstStyle/>
-          <a:p>
-            <a:pPr algn="l">
-              <a:lnSpc>
-                <a:spcPct val="120000"/>
-              </a:lnSpc>
-            </a:pPr>
-            <a:r>
-              <a:rPr sz="1200" b="1">
-                <a:solidFill>
-                  <a:srgbClr val="000000"/>
-                </a:solidFill>
-                <a:latin typeface="Helvetica Neue"/>
-              </a:rPr>
-              <a:t>論点4｜ACC業態と京都BALをどうするか</a:t>
-            </a:r>
-          </a:p>
-        </p:txBody>
-      </p:sp>
-      <p:sp>
-        <p:nvSpPr>
-          <p:cNvPr id="181" name="TextBox 180"/>
-          <p:cNvSpPr txBox="1"/>
-          <p:nvPr/>
-        </p:nvSpPr>
-        <p:spPr>
-          <a:xfrm>
-            <a:off x="1280160" y="3760470"/>
-            <a:ext cx="6784848" cy="345186"/>
-          </a:xfrm>
-          <a:prstGeom prst="rect">
-            <a:avLst/>
-          </a:prstGeom>
-          <a:noFill/>
-        </p:spPr>
-        <p:txBody>
-          <a:bodyPr wrap="square" anchor="t" lIns="0" rIns="0" tIns="0" bIns="0">
-            <a:spAutoFit/>
-          </a:bodyPr>
-          <a:lstStyle/>
-          <a:p>
-            <a:pPr algn="l">
-              <a:lnSpc>
-                <a:spcPct val="120000"/>
-              </a:lnSpc>
-            </a:pPr>
-            <a:r>
-              <a:rPr sz="1000" b="0">
-                <a:solidFill>
-                  <a:srgbClr val="000000"/>
-                </a:solidFill>
-                <a:latin typeface="Helvetica Neue"/>
-              </a:rPr>
-              <a:t>事実: ACC業態3店はいずれも二桁減、うち2店は客単価も低下。京都BALは-38.6%。／決めること: 業態転換・縮小・撤退の判断時期をいつに置くか。</a:t>
+              <a:t>事実: プロパー-114百万円をセール+121百万円が相殺。構成比は15.0%→20.4%。値引率は横ばいで、値引きを深めたのではなく量が増えた。／決めること: MD構成比の上限を設けるか。</a:t>
             </a:r>
           </a:p>
         </p:txBody>
@@ -25971,7 +25772,7 @@
             </a:pPr>
             <a:r>
               <a:rPr lang="en-GB"/>
-              <a:t>この分析の前提と限界</a:t>
+              <a:t>決めるべきこと② 顧客と商品</a:t>
             </a:r>
             <a:endParaRPr/>
           </a:p>
@@ -26066,7 +25867,7 @@
                 </a:solidFill>
                 <a:latin typeface="Helvetica Neue"/>
               </a:rPr>
-              <a:t>下期の意思決定の精度を上げるために、埋めるべきデータの穴を明示する。</a:t>
+              <a:t>新規が細り、上位客が抜け、特定商品が落ちている。打ち手はそれぞれ別である。</a:t>
             </a:r>
           </a:p>
         </p:txBody>
@@ -26124,7 +25925,7 @@
         <p:spPr>
           <a:xfrm>
             <a:off x="1280160" y="1792224"/>
-            <a:ext cx="3108959" cy="274320"/>
+            <a:ext cx="6784848" cy="274320"/>
           </a:xfrm>
           <a:prstGeom prst="rect">
             <a:avLst/>
@@ -26149,7 +25950,7 @@
                 </a:solidFill>
                 <a:latin typeface="Helvetica Neue"/>
               </a:rPr>
-              <a:t>予算データが無い</a:t>
+              <a:t>論点3｜新規獲得と既存育成の配分</a:t>
             </a:r>
           </a:p>
         </p:txBody>
@@ -26163,7 +25964,7 @@
         <p:spPr>
           <a:xfrm>
             <a:off x="1280160" y="2066543"/>
-            <a:ext cx="3108959" cy="864108"/>
+            <a:ext cx="6784848" cy="472440"/>
           </a:xfrm>
           <a:prstGeom prst="rect">
             <a:avLst/>
@@ -26188,7 +25989,7 @@
                 </a:solidFill>
                 <a:latin typeface="Helvetica Neue"/>
               </a:rPr>
-              <a:t>対計画・達成率は算出できていない。本資料の比較はすべて対前年。上期+0.3%が計画に対して良いのか悪いのかは判断できない。</a:t>
+              <a:t>事実: 新規客の減少は約-1.67億円、既存客の増加は約+0.18億円。約9倍の開き。／決めること: 集客・認知への投資を、Clienteling強化と並行してどう配分するか。</a:t>
             </a:r>
           </a:p>
         </p:txBody>
@@ -26201,7 +26002,7 @@
         </p:nvSpPr>
         <p:spPr>
           <a:xfrm>
-            <a:off x="1078992" y="3012948"/>
+            <a:off x="1078992" y="2621280"/>
             <a:ext cx="82296" cy="82296"/>
           </a:xfrm>
           <a:prstGeom prst="rect">
@@ -26245,8 +26046,8 @@
         </p:nvSpPr>
         <p:spPr>
           <a:xfrm>
-            <a:off x="1280160" y="2967228"/>
-            <a:ext cx="3108959" cy="274320"/>
+            <a:off x="1280160" y="2575560"/>
+            <a:ext cx="6784848" cy="274320"/>
           </a:xfrm>
           <a:prstGeom prst="rect">
             <a:avLst/>
@@ -26271,7 +26072,7 @@
                 </a:solidFill>
                 <a:latin typeface="Helvetica Neue"/>
               </a:rPr>
-              <a:t>入店客数が測れていない</a:t>
+              <a:t>論点4｜上位顧客の離反にいつ手を打つか</a:t>
             </a:r>
           </a:p>
         </p:txBody>
@@ -26284,8 +26085,8 @@
         </p:nvSpPr>
         <p:spPr>
           <a:xfrm>
-            <a:off x="1280160" y="3241548"/>
-            <a:ext cx="3108959" cy="864108"/>
+            <a:off x="1280160" y="2849880"/>
+            <a:ext cx="6784848" cy="472440"/>
           </a:xfrm>
           <a:prstGeom prst="rect">
             <a:avLst/>
@@ -26310,7 +26111,7 @@
                 </a:solidFill>
                 <a:latin typeface="Helvetica Neue"/>
               </a:rPr>
-              <a:t>客数-10.8%が「来店が減った」のか「来たが買われなかった」のか切り分けられない。トラフィックカウンターは設置状況の管理にとどまっている。</a:t>
+              <a:t>事実: 全体のリテンションは改善するも、50万円以上顧客だけ61.2%→58.2%と悪化。全体指標に埋もれている。／決めること: 外商・Clientelingの強化と離反原因の調査に着手するか。</a:t>
             </a:r>
           </a:p>
         </p:txBody>
@@ -26323,7 +26124,7 @@
         </p:nvSpPr>
         <p:spPr>
           <a:xfrm>
-            <a:off x="4754879" y="1837943"/>
+            <a:off x="1078992" y="3404616"/>
             <a:ext cx="82296" cy="82296"/>
           </a:xfrm>
           <a:prstGeom prst="rect">
@@ -26367,8 +26168,8 @@
         </p:nvSpPr>
         <p:spPr>
           <a:xfrm>
-            <a:off x="4956047" y="1792224"/>
-            <a:ext cx="3108959" cy="274320"/>
+            <a:off x="1280160" y="3358896"/>
+            <a:ext cx="6784848" cy="274320"/>
           </a:xfrm>
           <a:prstGeom prst="rect">
             <a:avLst/>
@@ -26393,7 +26194,7 @@
                 </a:solidFill>
                 <a:latin typeface="Helvetica Neue"/>
               </a:rPr>
-              <a:t>対象は26ドアのみ</a:t>
+              <a:t>論点5｜バッグとフットウェアの立て直し</a:t>
             </a:r>
           </a:p>
         </p:txBody>
@@ -26406,8 +26207,8 @@
         </p:nvSpPr>
         <p:spPr>
           <a:xfrm>
-            <a:off x="4956047" y="2066543"/>
-            <a:ext cx="3108959" cy="864108"/>
+            <a:off x="1280160" y="3633216"/>
+            <a:ext cx="6784848" cy="472440"/>
           </a:xfrm>
           <a:prstGeom prst="rect">
             <a:avLst/>
@@ -26432,20 +26233,221 @@
                 </a:solidFill>
                 <a:latin typeface="Helvetica Neue"/>
               </a:rPr>
-              <a:t>本資料はコレクション26ドア（直営＋コンセ）ベース。MARNI MARKET系・カフェ・アウトレット・オンライン・卸は含まない。上期のMARKET系162百万円を含めると絵が変わる。</a:t>
+              <a:t>事実: 不振はShopping Bag -71.3百万円等に集中し、ハンドバッグは+20.5百万円。フットウェアは数量-47.9%と悪化幅が最大。／決めること: 商品タイプ別に仕入れ・VMDを見直すか。</a:t>
             </a:r>
           </a:p>
         </p:txBody>
       </p:sp>
-      <p:sp>
-        <p:nvSpPr>
-          <p:cNvPr id="179" name="Rectangle 178"/>
+    </p:spTree>
+  </p:cSld>
+  <p:clrMapOvr>
+    <a:masterClrMapping/>
+  </p:clrMapOvr>
+</p:sld>
+</file>
+
+<file path=ppt/slides/slide36.xml><?xml version="1.0" encoding="utf-8"?>
+<p:sld xmlns:a="http://schemas.openxmlformats.org/drawingml/2006/main" xmlns:p="http://schemas.openxmlformats.org/presentationml/2006/main" xmlns:r="http://schemas.openxmlformats.org/officeDocument/2006/relationships">
+  <p:cSld>
+    <p:spTree>
+      <p:nvGrpSpPr>
+        <p:cNvPr id="1" name=""/>
+        <p:cNvGrpSpPr/>
+        <p:nvPr/>
+      </p:nvGrpSpPr>
+      <p:grpSpPr/>
+      <p:sp>
+        <p:nvSpPr>
+          <p:cNvPr id="164" name="Google Shape;164;p22"/>
+          <p:cNvSpPr txBox="1">
+            <a:spLocks noGrp="1"/>
+          </p:cNvSpPr>
+          <p:nvPr>
+            <p:ph type="sldNum" idx="12"/>
+          </p:nvPr>
+        </p:nvSpPr>
+        <p:spPr>
+          <a:xfrm>
+            <a:off x="8113758" y="4740600"/>
+            <a:ext cx="852900" cy="276900"/>
+          </a:xfrm>
+          <a:prstGeom prst="rect">
+            <a:avLst/>
+          </a:prstGeom>
+        </p:spPr>
+        <p:txBody>
+          <a:bodyPr spcFirstLastPara="1" wrap="square" lIns="91425" tIns="91425" rIns="91425" bIns="91425" anchor="ctr" anchorCtr="0">
+            <a:spAutoFit/>
+          </a:bodyPr>
+          <a:lstStyle/>
+          <a:p>
+            <a:pPr marL="0" lvl="0" indent="0" algn="r" rtl="0">
+              <a:spcBef>
+                <a:spcPts val="0"/>
+              </a:spcBef>
+              <a:spcAft>
+                <a:spcPts val="0"/>
+              </a:spcAft>
+              <a:buNone/>
+            </a:pPr>
+            <a:fld id="{00000000-1234-1234-1234-123412341234}" type="slidenum">
+              <a:rPr lang="en-GB"/>
+              <a:t>5</a:t>
+            </a:fld>
+            <a:endParaRPr>
+              <a:latin typeface="Inter Light"/>
+              <a:ea typeface="Inter Light"/>
+              <a:cs typeface="Inter Light"/>
+              <a:sym typeface="Inter Light"/>
+            </a:endParaRPr>
+          </a:p>
+        </p:txBody>
+      </p:sp>
+      <p:sp>
+        <p:nvSpPr>
+          <p:cNvPr id="165" name="Google Shape;165;p22"/>
+          <p:cNvSpPr txBox="1">
+            <a:spLocks noGrp="1"/>
+          </p:cNvSpPr>
+          <p:nvPr>
+            <p:ph type="subTitle" idx="1"/>
+          </p:nvPr>
+        </p:nvSpPr>
+        <p:spPr>
+          <a:xfrm>
+            <a:off x="1079995" y="168107"/>
+            <a:ext cx="7699248" cy="523200"/>
+          </a:xfrm>
+          <a:prstGeom prst="rect">
+            <a:avLst/>
+          </a:prstGeom>
+        </p:spPr>
+        <p:txBody>
+          <a:bodyPr spcFirstLastPara="1" wrap="square" lIns="91425" tIns="91425" rIns="91425" bIns="91425" anchor="t" anchorCtr="0">
+            <a:spAutoFit/>
+          </a:bodyPr>
+          <a:lstStyle/>
+          <a:p>
+            <a:pPr marL="0" lvl="0" indent="0" algn="l" rtl="0">
+              <a:spcBef>
+                <a:spcPts val="0"/>
+              </a:spcBef>
+              <a:spcAft>
+                <a:spcPts val="0"/>
+              </a:spcAft>
+              <a:buNone/>
+            </a:pPr>
+            <a:r>
+              <a:rPr lang="en-GB"/>
+              <a:t>この分析の前提と限界</a:t>
+            </a:r>
+            <a:endParaRPr/>
+          </a:p>
+        </p:txBody>
+      </p:sp>
+      <p:sp>
+        <p:nvSpPr>
+          <p:cNvPr id="168" name="Google Shape;168;p22"/>
+          <p:cNvSpPr txBox="1"/>
+          <p:nvPr/>
+        </p:nvSpPr>
+        <p:spPr>
+          <a:xfrm>
+            <a:off x="177325" y="162999"/>
+            <a:ext cx="708600" cy="523200"/>
+          </a:xfrm>
+          <a:prstGeom prst="rect">
+            <a:avLst/>
+          </a:prstGeom>
+          <a:noFill/>
+          <a:ln>
+            <a:noFill/>
+          </a:ln>
+        </p:spPr>
+        <p:txBody>
+          <a:bodyPr spcFirstLastPara="1" wrap="square" lIns="91425" tIns="91425" rIns="91425" bIns="91425" anchor="t" anchorCtr="0">
+            <a:noAutofit/>
+          </a:bodyPr>
+          <a:lstStyle/>
+          <a:p>
+            <a:pPr marL="0" lvl="0" indent="0" algn="l" rtl="0">
+              <a:spcBef>
+                <a:spcPts val="0"/>
+              </a:spcBef>
+              <a:spcAft>
+                <a:spcPts val="0"/>
+              </a:spcAft>
+              <a:buNone/>
+            </a:pPr>
+            <a:r>
+              <a:rPr lang="en-GB" sz="2200" b="1" dirty="0">
+                <a:latin typeface="Helvetica Neue"/>
+                <a:ea typeface="Helvetica Neue"/>
+                <a:cs typeface="Helvetica Neue"/>
+                <a:sym typeface="Helvetica Neue"/>
+              </a:rPr>
+              <a:t>5.3</a:t>
+            </a:r>
+            <a:endParaRPr sz="2200" dirty="0">
+              <a:solidFill>
+                <a:srgbClr val="000000"/>
+              </a:solidFill>
+              <a:latin typeface="Helvetica Neue"/>
+              <a:ea typeface="Helvetica Neue"/>
+              <a:cs typeface="Helvetica Neue"/>
+              <a:sym typeface="Helvetica Neue"/>
+            </a:endParaRPr>
+          </a:p>
+        </p:txBody>
+      </p:sp>
+      <p:sp>
+        <p:nvSpPr>
+          <p:cNvPr id="169" name="TextBox 168"/>
+          <p:cNvSpPr txBox="1"/>
+          <p:nvPr/>
+        </p:nvSpPr>
+        <p:spPr>
+          <a:xfrm>
+            <a:off x="1078992" y="1078992"/>
+            <a:ext cx="6986016" cy="548640"/>
+          </a:xfrm>
+          <a:prstGeom prst="rect">
+            <a:avLst/>
+          </a:prstGeom>
+          <a:noFill/>
+        </p:spPr>
+        <p:txBody>
+          <a:bodyPr wrap="square" anchor="t" lIns="0" rIns="0" tIns="0" bIns="0">
+            <a:spAutoFit/>
+          </a:bodyPr>
+          <a:lstStyle/>
+          <a:p>
+            <a:pPr algn="l">
+              <a:lnSpc>
+                <a:spcPct val="120000"/>
+              </a:lnSpc>
+            </a:pPr>
+            <a:r>
+              <a:rPr sz="1600" b="0">
+                <a:solidFill>
+                  <a:srgbClr val="000000"/>
+                </a:solidFill>
+                <a:latin typeface="Helvetica Neue"/>
+              </a:rPr>
+              <a:t>下期の意思決定の精度を上げるために、埋めるべきデータの穴を明示する。</a:t>
+            </a:r>
+          </a:p>
+        </p:txBody>
+      </p:sp>
+      <p:sp>
+        <p:nvSpPr>
+          <p:cNvPr id="170" name="Rectangle 169"/>
           <p:cNvSpPr/>
           <p:nvPr/>
         </p:nvSpPr>
         <p:spPr>
           <a:xfrm>
-            <a:off x="4754879" y="3012948"/>
+            <a:off x="1078992" y="1837943"/>
             <a:ext cx="82296" cy="82296"/>
           </a:xfrm>
           <a:prstGeom prst="rect">
@@ -26483,6 +26485,372 @@
       </p:sp>
       <p:sp>
         <p:nvSpPr>
+          <p:cNvPr id="171" name="TextBox 170"/>
+          <p:cNvSpPr txBox="1"/>
+          <p:nvPr/>
+        </p:nvSpPr>
+        <p:spPr>
+          <a:xfrm>
+            <a:off x="1280160" y="1792224"/>
+            <a:ext cx="3108959" cy="274320"/>
+          </a:xfrm>
+          <a:prstGeom prst="rect">
+            <a:avLst/>
+          </a:prstGeom>
+          <a:noFill/>
+        </p:spPr>
+        <p:txBody>
+          <a:bodyPr wrap="square" anchor="t" lIns="0" rIns="0" tIns="0" bIns="0">
+            <a:spAutoFit/>
+          </a:bodyPr>
+          <a:lstStyle/>
+          <a:p>
+            <a:pPr algn="l">
+              <a:lnSpc>
+                <a:spcPct val="120000"/>
+              </a:lnSpc>
+            </a:pPr>
+            <a:r>
+              <a:rPr sz="1200" b="1">
+                <a:solidFill>
+                  <a:srgbClr val="000000"/>
+                </a:solidFill>
+                <a:latin typeface="Helvetica Neue"/>
+              </a:rPr>
+              <a:t>予算データが無い</a:t>
+            </a:r>
+          </a:p>
+        </p:txBody>
+      </p:sp>
+      <p:sp>
+        <p:nvSpPr>
+          <p:cNvPr id="172" name="TextBox 171"/>
+          <p:cNvSpPr txBox="1"/>
+          <p:nvPr/>
+        </p:nvSpPr>
+        <p:spPr>
+          <a:xfrm>
+            <a:off x="1280160" y="2066543"/>
+            <a:ext cx="3108959" cy="864108"/>
+          </a:xfrm>
+          <a:prstGeom prst="rect">
+            <a:avLst/>
+          </a:prstGeom>
+          <a:noFill/>
+        </p:spPr>
+        <p:txBody>
+          <a:bodyPr wrap="square" anchor="t" lIns="0" rIns="0" tIns="0" bIns="0">
+            <a:spAutoFit/>
+          </a:bodyPr>
+          <a:lstStyle/>
+          <a:p>
+            <a:pPr algn="l">
+              <a:lnSpc>
+                <a:spcPct val="120000"/>
+              </a:lnSpc>
+            </a:pPr>
+            <a:r>
+              <a:rPr sz="1000" b="0">
+                <a:solidFill>
+                  <a:srgbClr val="000000"/>
+                </a:solidFill>
+                <a:latin typeface="Helvetica Neue"/>
+              </a:rPr>
+              <a:t>対計画・達成率は算出できていない。本資料の比較はすべて対前年。上期+0.3%が計画に対して良いのか悪いのかは判断できない。</a:t>
+            </a:r>
+          </a:p>
+        </p:txBody>
+      </p:sp>
+      <p:sp>
+        <p:nvSpPr>
+          <p:cNvPr id="173" name="Rectangle 172"/>
+          <p:cNvSpPr/>
+          <p:nvPr/>
+        </p:nvSpPr>
+        <p:spPr>
+          <a:xfrm>
+            <a:off x="1078992" y="3012948"/>
+            <a:ext cx="82296" cy="82296"/>
+          </a:xfrm>
+          <a:prstGeom prst="rect">
+            <a:avLst/>
+          </a:prstGeom>
+          <a:solidFill>
+            <a:srgbClr val="DA1212"/>
+          </a:solidFill>
+          <a:ln>
+            <a:noFill/>
+          </a:ln>
+          <a:effectLst/>
+        </p:spPr>
+        <p:style>
+          <a:lnRef idx="1">
+            <a:schemeClr val="accent1"/>
+          </a:lnRef>
+          <a:fillRef idx="3">
+            <a:schemeClr val="accent1"/>
+          </a:fillRef>
+          <a:effectRef idx="2">
+            <a:schemeClr val="accent1"/>
+          </a:effectRef>
+          <a:fontRef idx="minor">
+            <a:schemeClr val="lt1"/>
+          </a:fontRef>
+        </p:style>
+        <p:txBody>
+          <a:bodyPr rtlCol="0" anchor="ctr"/>
+          <a:lstStyle/>
+          <a:p>
+            <a:pPr algn="ctr"/>
+          </a:p>
+        </p:txBody>
+      </p:sp>
+      <p:sp>
+        <p:nvSpPr>
+          <p:cNvPr id="174" name="TextBox 173"/>
+          <p:cNvSpPr txBox="1"/>
+          <p:nvPr/>
+        </p:nvSpPr>
+        <p:spPr>
+          <a:xfrm>
+            <a:off x="1280160" y="2967228"/>
+            <a:ext cx="3108959" cy="274320"/>
+          </a:xfrm>
+          <a:prstGeom prst="rect">
+            <a:avLst/>
+          </a:prstGeom>
+          <a:noFill/>
+        </p:spPr>
+        <p:txBody>
+          <a:bodyPr wrap="square" anchor="t" lIns="0" rIns="0" tIns="0" bIns="0">
+            <a:spAutoFit/>
+          </a:bodyPr>
+          <a:lstStyle/>
+          <a:p>
+            <a:pPr algn="l">
+              <a:lnSpc>
+                <a:spcPct val="120000"/>
+              </a:lnSpc>
+            </a:pPr>
+            <a:r>
+              <a:rPr sz="1200" b="1">
+                <a:solidFill>
+                  <a:srgbClr val="000000"/>
+                </a:solidFill>
+                <a:latin typeface="Helvetica Neue"/>
+              </a:rPr>
+              <a:t>入店客数が測れていない</a:t>
+            </a:r>
+          </a:p>
+        </p:txBody>
+      </p:sp>
+      <p:sp>
+        <p:nvSpPr>
+          <p:cNvPr id="175" name="TextBox 174"/>
+          <p:cNvSpPr txBox="1"/>
+          <p:nvPr/>
+        </p:nvSpPr>
+        <p:spPr>
+          <a:xfrm>
+            <a:off x="1280160" y="3241548"/>
+            <a:ext cx="3108959" cy="864108"/>
+          </a:xfrm>
+          <a:prstGeom prst="rect">
+            <a:avLst/>
+          </a:prstGeom>
+          <a:noFill/>
+        </p:spPr>
+        <p:txBody>
+          <a:bodyPr wrap="square" anchor="t" lIns="0" rIns="0" tIns="0" bIns="0">
+            <a:spAutoFit/>
+          </a:bodyPr>
+          <a:lstStyle/>
+          <a:p>
+            <a:pPr algn="l">
+              <a:lnSpc>
+                <a:spcPct val="120000"/>
+              </a:lnSpc>
+            </a:pPr>
+            <a:r>
+              <a:rPr sz="1000" b="0">
+                <a:solidFill>
+                  <a:srgbClr val="000000"/>
+                </a:solidFill>
+                <a:latin typeface="Helvetica Neue"/>
+              </a:rPr>
+              <a:t>客数-10.8%が「来店が減った」のか「来たが買われなかった」のか切り分けられない。トラフィックカウンターは設置状況の管理にとどまっている。</a:t>
+            </a:r>
+          </a:p>
+        </p:txBody>
+      </p:sp>
+      <p:sp>
+        <p:nvSpPr>
+          <p:cNvPr id="176" name="Rectangle 175"/>
+          <p:cNvSpPr/>
+          <p:nvPr/>
+        </p:nvSpPr>
+        <p:spPr>
+          <a:xfrm>
+            <a:off x="4754879" y="1837943"/>
+            <a:ext cx="82296" cy="82296"/>
+          </a:xfrm>
+          <a:prstGeom prst="rect">
+            <a:avLst/>
+          </a:prstGeom>
+          <a:solidFill>
+            <a:srgbClr val="DA1212"/>
+          </a:solidFill>
+          <a:ln>
+            <a:noFill/>
+          </a:ln>
+          <a:effectLst/>
+        </p:spPr>
+        <p:style>
+          <a:lnRef idx="1">
+            <a:schemeClr val="accent1"/>
+          </a:lnRef>
+          <a:fillRef idx="3">
+            <a:schemeClr val="accent1"/>
+          </a:fillRef>
+          <a:effectRef idx="2">
+            <a:schemeClr val="accent1"/>
+          </a:effectRef>
+          <a:fontRef idx="minor">
+            <a:schemeClr val="lt1"/>
+          </a:fontRef>
+        </p:style>
+        <p:txBody>
+          <a:bodyPr rtlCol="0" anchor="ctr"/>
+          <a:lstStyle/>
+          <a:p>
+            <a:pPr algn="ctr"/>
+          </a:p>
+        </p:txBody>
+      </p:sp>
+      <p:sp>
+        <p:nvSpPr>
+          <p:cNvPr id="177" name="TextBox 176"/>
+          <p:cNvSpPr txBox="1"/>
+          <p:nvPr/>
+        </p:nvSpPr>
+        <p:spPr>
+          <a:xfrm>
+            <a:off x="4956047" y="1792224"/>
+            <a:ext cx="3108959" cy="274320"/>
+          </a:xfrm>
+          <a:prstGeom prst="rect">
+            <a:avLst/>
+          </a:prstGeom>
+          <a:noFill/>
+        </p:spPr>
+        <p:txBody>
+          <a:bodyPr wrap="square" anchor="t" lIns="0" rIns="0" tIns="0" bIns="0">
+            <a:spAutoFit/>
+          </a:bodyPr>
+          <a:lstStyle/>
+          <a:p>
+            <a:pPr algn="l">
+              <a:lnSpc>
+                <a:spcPct val="120000"/>
+              </a:lnSpc>
+            </a:pPr>
+            <a:r>
+              <a:rPr sz="1200" b="1">
+                <a:solidFill>
+                  <a:srgbClr val="000000"/>
+                </a:solidFill>
+                <a:latin typeface="Helvetica Neue"/>
+              </a:rPr>
+              <a:t>対象は26ドアのみ</a:t>
+            </a:r>
+          </a:p>
+        </p:txBody>
+      </p:sp>
+      <p:sp>
+        <p:nvSpPr>
+          <p:cNvPr id="178" name="TextBox 177"/>
+          <p:cNvSpPr txBox="1"/>
+          <p:nvPr/>
+        </p:nvSpPr>
+        <p:spPr>
+          <a:xfrm>
+            <a:off x="4956047" y="2066543"/>
+            <a:ext cx="3108959" cy="864108"/>
+          </a:xfrm>
+          <a:prstGeom prst="rect">
+            <a:avLst/>
+          </a:prstGeom>
+          <a:noFill/>
+        </p:spPr>
+        <p:txBody>
+          <a:bodyPr wrap="square" anchor="t" lIns="0" rIns="0" tIns="0" bIns="0">
+            <a:spAutoFit/>
+          </a:bodyPr>
+          <a:lstStyle/>
+          <a:p>
+            <a:pPr algn="l">
+              <a:lnSpc>
+                <a:spcPct val="120000"/>
+              </a:lnSpc>
+            </a:pPr>
+            <a:r>
+              <a:rPr sz="1000" b="0">
+                <a:solidFill>
+                  <a:srgbClr val="000000"/>
+                </a:solidFill>
+                <a:latin typeface="Helvetica Neue"/>
+              </a:rPr>
+              <a:t>本資料はコレクション26ドア（直営＋コンセ）ベース。MARNI MARKET系・カフェ・アウトレット・オンライン・卸は含まない。上期のMARKET系162百万円を含めると絵が変わる。</a:t>
+            </a:r>
+          </a:p>
+        </p:txBody>
+      </p:sp>
+      <p:sp>
+        <p:nvSpPr>
+          <p:cNvPr id="179" name="Rectangle 178"/>
+          <p:cNvSpPr/>
+          <p:nvPr/>
+        </p:nvSpPr>
+        <p:spPr>
+          <a:xfrm>
+            <a:off x="4754879" y="3012948"/>
+            <a:ext cx="82296" cy="82296"/>
+          </a:xfrm>
+          <a:prstGeom prst="rect">
+            <a:avLst/>
+          </a:prstGeom>
+          <a:solidFill>
+            <a:srgbClr val="DA1212"/>
+          </a:solidFill>
+          <a:ln>
+            <a:noFill/>
+          </a:ln>
+          <a:effectLst/>
+        </p:spPr>
+        <p:style>
+          <a:lnRef idx="1">
+            <a:schemeClr val="accent1"/>
+          </a:lnRef>
+          <a:fillRef idx="3">
+            <a:schemeClr val="accent1"/>
+          </a:fillRef>
+          <a:effectRef idx="2">
+            <a:schemeClr val="accent1"/>
+          </a:effectRef>
+          <a:fontRef idx="minor">
+            <a:schemeClr val="lt1"/>
+          </a:fontRef>
+        </p:style>
+        <p:txBody>
+          <a:bodyPr rtlCol="0" anchor="ctr"/>
+          <a:lstStyle/>
+          <a:p>
+            <a:pPr algn="ctr"/>
+          </a:p>
+        </p:txBody>
+      </p:sp>
+      <p:sp>
+        <p:nvSpPr>
           <p:cNvPr id="180" name="TextBox 179"/>
           <p:cNvSpPr txBox="1"/>
           <p:nvPr/>
@@ -26567,7 +26935,7 @@
 </p:sld>
 </file>
 
-<file path=ppt/slides/slide36.xml><?xml version="1.0" encoding="utf-8"?>
+<file path=ppt/slides/slide37.xml><?xml version="1.0" encoding="utf-8"?>
 <p:sld xmlns:a="http://schemas.openxmlformats.org/drawingml/2006/main" xmlns:p="http://schemas.openxmlformats.org/presentationml/2006/main" xmlns:r="http://schemas.openxmlformats.org/officeDocument/2006/relationships">
   <p:cSld>
     <p:spTree>
